--- a/iColorPlus_AR_TryOn_Proposal.pptx
+++ b/iColorPlus_AR_TryOn_Proposal.pptx
@@ -4519,7 +4519,7 @@
                 </a:solidFill>
                 <a:latin typeface="Calibri"/>
               </a:rPr>
-              <a:t>Mineski Global (Philippines)</a:t>
+              <a:t>Conrad</a:t>
             </a:r>
             <a:r>
               <a:rPr sz="1250" b="0" i="0">
@@ -4698,7 +4698,7 @@
                 </a:solidFill>
                 <a:latin typeface="Calibri"/>
               </a:rPr>
-              <a:t>Mineski Global (Philippines)  ×  iColor Plus — Great Lengths</a:t>
+              <a:t>Conrad  ×  iColor Plus — Great Lengths</a:t>
             </a:r>
           </a:p>
         </p:txBody>
@@ -5523,7 +5523,7 @@
                 </a:solidFill>
                 <a:latin typeface="Calibri"/>
               </a:rPr>
-              <a:t>Mineski Global (Philippines)  ×  iColor Plus — Great Lengths</a:t>
+              <a:t>Conrad  ×  iColor Plus — Great Lengths</a:t>
             </a:r>
           </a:p>
         </p:txBody>
@@ -6392,7 +6392,7 @@
                 </a:solidFill>
                 <a:latin typeface="Calibri"/>
               </a:rPr>
-              <a:t>Mineski Global (Philippines)  ×  iColor Plus — Great Lengths</a:t>
+              <a:t>Conrad  ×  iColor Plus — Great Lengths</a:t>
             </a:r>
           </a:p>
         </p:txBody>
@@ -8316,7 +8316,7 @@
                 </a:solidFill>
                 <a:latin typeface="Calibri"/>
               </a:rPr>
-              <a:t>Mineski Global (Philippines)  ×  iColor Plus — Great Lengths</a:t>
+              <a:t>Conrad  ×  iColor Plus — Great Lengths</a:t>
             </a:r>
           </a:p>
         </p:txBody>
@@ -10786,7 +10786,7 @@
                 </a:solidFill>
                 <a:latin typeface="Calibri"/>
               </a:rPr>
-              <a:t>Mineski Global (Philippines)  ×  iColor Plus — Great Lengths</a:t>
+              <a:t>Conrad  ×  iColor Plus — Great Lengths</a:t>
             </a:r>
           </a:p>
         </p:txBody>
@@ -12884,7 +12884,7 @@
                 </a:solidFill>
                 <a:latin typeface="Calibri"/>
               </a:rPr>
-              <a:t>Mineski Global (Philippines)  ×  iColor Plus — Great Lengths</a:t>
+              <a:t>Conrad  ×  iColor Plus — Great Lengths</a:t>
             </a:r>
           </a:p>
         </p:txBody>
@@ -13846,7 +13846,7 @@
                 </a:solidFill>
                 <a:latin typeface="Calibri"/>
               </a:rPr>
-              <a:t>Mineski Global (Philippines)  ×  iColor Plus — Great Lengths</a:t>
+              <a:t>Conrad  ×  iColor Plus — Great Lengths</a:t>
             </a:r>
           </a:p>
         </p:txBody>
@@ -15094,7 +15094,7 @@
                 </a:solidFill>
                 <a:latin typeface="Calibri"/>
               </a:rPr>
-              <a:t>Mineski Global (Philippines)  ×  iColor Plus — Great Lengths</a:t>
+              <a:t>Conrad  ×  iColor Plus — Great Lengths</a:t>
             </a:r>
           </a:p>
         </p:txBody>
@@ -15672,7 +15672,7 @@
                 </a:solidFill>
                 <a:latin typeface="Calibri"/>
               </a:rPr>
-              <a:t>Mineski Global (Philippines)</a:t>
+              <a:t>Conrad</a:t>
             </a:r>
           </a:p>
         </p:txBody>
@@ -15707,7 +15707,7 @@
                 </a:solidFill>
                 <a:latin typeface="Calibri"/>
               </a:rPr>
-              <a:t>Mineski Global (Philippines)  ×  iColor Plus — Great Lengths</a:t>
+              <a:t>Conrad  ×  iColor Plus — Great Lengths</a:t>
             </a:r>
           </a:p>
         </p:txBody>
@@ -16606,7 +16606,7 @@
                 </a:solidFill>
                 <a:latin typeface="Calibri"/>
               </a:rPr>
-              <a:t>Mineski Global (Philippines)  ×  iColor Plus — Great Lengths</a:t>
+              <a:t>Conrad  ×  iColor Plus — Great Lengths</a:t>
             </a:r>
           </a:p>
         </p:txBody>
@@ -17980,7 +17980,7 @@
                 </a:solidFill>
                 <a:latin typeface="Calibri"/>
               </a:rPr>
-              <a:t>Mineski Global (Philippines)  ×  iColor Plus — Great Lengths</a:t>
+              <a:t>Conrad  ×  iColor Plus — Great Lengths</a:t>
             </a:r>
           </a:p>
         </p:txBody>
@@ -19040,7 +19040,7 @@
                 </a:solidFill>
                 <a:latin typeface="Calibri"/>
               </a:rPr>
-              <a:t>Mineski Global (Philippines)  ×  iColor Plus — Great Lengths</a:t>
+              <a:t>Conrad  ×  iColor Plus — Great Lengths</a:t>
             </a:r>
           </a:p>
         </p:txBody>
@@ -21203,7 +21203,7 @@
                 </a:solidFill>
                 <a:latin typeface="Calibri"/>
               </a:rPr>
-              <a:t>Mineski Global (Philippines)  ×  iColor Plus — Great Lengths</a:t>
+              <a:t>Conrad  ×  iColor Plus — Great Lengths</a:t>
             </a:r>
           </a:p>
         </p:txBody>
@@ -22999,7 +22999,7 @@
                 </a:solidFill>
                 <a:latin typeface="Calibri"/>
               </a:rPr>
-              <a:t>Mineski Global (Philippines)  ×  iColor Plus — Great Lengths</a:t>
+              <a:t>Conrad  ×  iColor Plus — Great Lengths</a:t>
             </a:r>
           </a:p>
         </p:txBody>
@@ -23892,7 +23892,7 @@
                 </a:solidFill>
                 <a:latin typeface="Calibri"/>
               </a:rPr>
-              <a:t>Mineski Global (Philippines)  ×  iColor Plus — Great Lengths</a:t>
+              <a:t>Conrad  ×  iColor Plus — Great Lengths</a:t>
             </a:r>
           </a:p>
         </p:txBody>
@@ -25691,7 +25691,7 @@
                 </a:solidFill>
                 <a:latin typeface="Calibri"/>
               </a:rPr>
-              <a:t>Mineski Global (Philippines)  ×  iColor Plus — Great Lengths</a:t>
+              <a:t>Conrad  ×  iColor Plus — Great Lengths</a:t>
             </a:r>
           </a:p>
         </p:txBody>
@@ -26665,7 +26665,7 @@
                 </a:solidFill>
                 <a:latin typeface="Calibri"/>
               </a:rPr>
-              <a:t>Mineski Global (Philippines)  ×  iColor Plus — Great Lengths</a:t>
+              <a:t>Conrad  ×  iColor Plus — Great Lengths</a:t>
             </a:r>
           </a:p>
         </p:txBody>
